--- a/week4_unixIV/week4.pptx
+++ b/week4_unixIV/week4.pptx
@@ -976,6 +976,90 @@
     <p:extLst>
       <p:ext uri="{BB962C8B-B14F-4D97-AF65-F5344CB8AC3E}">
         <p14:creationId xmlns:p14="http://schemas.microsoft.com/office/powerpoint/2010/main" val="3724775147"/>
+      </p:ext>
+    </p:extLst>
+  </p:cSld>
+  <p:clrMapOvr>
+    <a:masterClrMapping/>
+  </p:clrMapOvr>
+</p:notes>
+</file>
+
+<file path=ppt/notesSlides/notesSlide7.xml><?xml version="1.0" encoding="utf-8"?>
+<p:notes xmlns:a="http://schemas.openxmlformats.org/drawingml/2006/main" xmlns:r="http://schemas.openxmlformats.org/officeDocument/2006/relationships" xmlns:p="http://schemas.openxmlformats.org/presentationml/2006/main">
+  <p:cSld>
+    <p:spTree>
+      <p:nvGrpSpPr>
+        <p:cNvPr id="1" name=""/>
+        <p:cNvGrpSpPr/>
+        <p:nvPr/>
+      </p:nvGrpSpPr>
+      <p:grpSpPr>
+        <a:xfrm>
+          <a:off x="0" y="0"/>
+          <a:ext cx="0" cy="0"/>
+          <a:chOff x="0" y="0"/>
+          <a:chExt cx="0" cy="0"/>
+        </a:xfrm>
+      </p:grpSpPr>
+      <p:sp>
+        <p:nvSpPr>
+          <p:cNvPr id="2" name="Slide Image Placeholder 1"/>
+          <p:cNvSpPr>
+            <a:spLocks noGrp="1" noRot="1" noChangeAspect="1"/>
+          </p:cNvSpPr>
+          <p:nvPr>
+            <p:ph type="sldImg"/>
+          </p:nvPr>
+        </p:nvSpPr>
+        <p:spPr/>
+      </p:sp>
+      <p:sp>
+        <p:nvSpPr>
+          <p:cNvPr id="3" name="Notes Placeholder 2"/>
+          <p:cNvSpPr>
+            <a:spLocks noGrp="1"/>
+          </p:cNvSpPr>
+          <p:nvPr>
+            <p:ph type="body" idx="1"/>
+          </p:nvPr>
+        </p:nvSpPr>
+        <p:spPr/>
+        <p:txBody>
+          <a:bodyPr/>
+          <a:lstStyle/>
+          <a:p>
+            <a:endParaRPr lang="en-US" dirty="0"/>
+          </a:p>
+        </p:txBody>
+      </p:sp>
+      <p:sp>
+        <p:nvSpPr>
+          <p:cNvPr id="4" name="Slide Number Placeholder 3"/>
+          <p:cNvSpPr>
+            <a:spLocks noGrp="1"/>
+          </p:cNvSpPr>
+          <p:nvPr>
+            <p:ph type="sldNum" sz="quarter" idx="5"/>
+          </p:nvPr>
+        </p:nvSpPr>
+        <p:spPr/>
+        <p:txBody>
+          <a:bodyPr/>
+          <a:lstStyle/>
+          <a:p>
+            <a:fld id="{FBC3CC19-939B-124D-AEB5-0A0C0D7EEB85}" type="slidenum">
+              <a:rPr lang="en-US" smtClean="0"/>
+              <a:t>18</a:t>
+            </a:fld>
+            <a:endParaRPr lang="en-US"/>
+          </a:p>
+        </p:txBody>
+      </p:sp>
+    </p:spTree>
+    <p:extLst>
+      <p:ext uri="{BB962C8B-B14F-4D97-AF65-F5344CB8AC3E}">
+        <p14:creationId xmlns:p14="http://schemas.microsoft.com/office/powerpoint/2010/main" val="1623208004"/>
       </p:ext>
     </p:extLst>
   </p:cSld>
@@ -6223,7 +6307,7 @@
         <p:spPr>
           <a:xfrm>
             <a:off x="1271752" y="5857705"/>
-            <a:ext cx="5327099" cy="646331"/>
+            <a:ext cx="5094664" cy="646331"/>
           </a:xfrm>
           <a:prstGeom prst="rect">
             <a:avLst/>
@@ -6248,7 +6332,19 @@
               <a:rPr lang="en-US" b="1" dirty="0">
                 <a:latin typeface="Helvetica Light" panose="020B0403020202020204" pitchFamily="34" charset="0"/>
               </a:rPr>
-              <a:t>$ bash mac2unix.sh </a:t>
+              <a:t>$ </a:t>
+            </a:r>
+            <a:r>
+              <a:rPr lang="en-US" b="1" dirty="0" err="1">
+                <a:latin typeface="Helvetica Light" panose="020B0403020202020204" pitchFamily="34" charset="0"/>
+              </a:rPr>
+              <a:t>zsh</a:t>
+            </a:r>
+            <a:r>
+              <a:rPr lang="en-US" b="1" dirty="0">
+                <a:latin typeface="Helvetica Light" panose="020B0403020202020204" pitchFamily="34" charset="0"/>
+              </a:rPr>
+              <a:t> mac2unix.sh </a:t>
             </a:r>
             <a:r>
               <a:rPr lang="en-US" b="1" dirty="0" err="1">
@@ -6936,7 +7032,19 @@
               <a:rPr lang="en-US" sz="2400" b="1" dirty="0">
                 <a:latin typeface="Helvetica Light" panose="020B0403020202020204" pitchFamily="34" charset="0"/>
               </a:rPr>
-              <a:t>$ bash </a:t>
+              <a:t>$ </a:t>
+            </a:r>
+            <a:r>
+              <a:rPr lang="en-US" sz="2400" b="1" dirty="0" err="1">
+                <a:latin typeface="Helvetica Light" panose="020B0403020202020204" pitchFamily="34" charset="0"/>
+              </a:rPr>
+              <a:t>zsh</a:t>
+            </a:r>
+            <a:r>
+              <a:rPr lang="en-US" sz="2400" b="1" dirty="0">
+                <a:latin typeface="Helvetica Light" panose="020B0403020202020204" pitchFamily="34" charset="0"/>
+              </a:rPr>
+              <a:t> </a:t>
             </a:r>
             <a:r>
               <a:rPr lang="en-US" sz="2400" b="1" dirty="0" err="1">
@@ -6976,7 +7084,19 @@
               <a:rPr lang="en-US" sz="2400" b="1" dirty="0">
                 <a:latin typeface="Helvetica Light" panose="020B0403020202020204" pitchFamily="34" charset="0"/>
               </a:rPr>
-              <a:t>$ bash mac2unix.sh </a:t>
+              <a:t>$ </a:t>
+            </a:r>
+            <a:r>
+              <a:rPr lang="en-US" sz="2400" b="1" dirty="0" err="1">
+                <a:latin typeface="Helvetica Light" panose="020B0403020202020204" pitchFamily="34" charset="0"/>
+              </a:rPr>
+              <a:t>zsh</a:t>
+            </a:r>
+            <a:r>
+              <a:rPr lang="en-US" sz="2400" b="1" dirty="0">
+                <a:latin typeface="Helvetica Light" panose="020B0403020202020204" pitchFamily="34" charset="0"/>
+              </a:rPr>
+              <a:t> mac2unix.sh </a:t>
             </a:r>
             <a:r>
               <a:rPr lang="en-US" sz="2400" b="1" dirty="0" err="1">
@@ -7013,7 +7133,19 @@
               <a:rPr lang="en-US" sz="2400" b="1" dirty="0">
                 <a:latin typeface="Helvetica Light" panose="020B0403020202020204" pitchFamily="34" charset="0"/>
               </a:rPr>
-              <a:t>$ bash mac2unix.sh </a:t>
+              <a:t>$ </a:t>
+            </a:r>
+            <a:r>
+              <a:rPr lang="en-US" sz="2400" b="1" dirty="0" err="1">
+                <a:latin typeface="Helvetica Light" panose="020B0403020202020204" pitchFamily="34" charset="0"/>
+              </a:rPr>
+              <a:t>zsh</a:t>
+            </a:r>
+            <a:r>
+              <a:rPr lang="en-US" sz="2400" b="1" dirty="0">
+                <a:latin typeface="Helvetica Light" panose="020B0403020202020204" pitchFamily="34" charset="0"/>
+              </a:rPr>
+              <a:t> mac2unix.sh </a:t>
             </a:r>
             <a:r>
               <a:rPr lang="en-US" sz="2400" b="1" dirty="0">
@@ -8181,7 +8313,7 @@
               <a:t>Work through </a:t>
             </a:r>
             <a:r>
-              <a:rPr lang="en-US" sz="2400" dirty="0" err="1">
+              <a:rPr lang="en-US" sz="2400" b="1" dirty="0" err="1">
                 <a:ln>
                   <a:solidFill>
                     <a:schemeClr val="tx1"/>
@@ -8193,7 +8325,7 @@
               <a:t>linuxIV_</a:t>
             </a:r>
             <a:r>
-              <a:rPr lang="en-US" sz="2600" dirty="0" err="1">
+              <a:rPr lang="en-US" sz="2600" b="1" dirty="0" err="1">
                 <a:ln>
                   <a:solidFill>
                     <a:schemeClr val="tx1"/>
@@ -8205,7 +8337,7 @@
               <a:t>primer</a:t>
             </a:r>
             <a:r>
-              <a:rPr lang="en-US" sz="2400" dirty="0" err="1">
+              <a:rPr lang="en-US" sz="2400" b="1" dirty="0" err="1">
                 <a:ln>
                   <a:solidFill>
                     <a:schemeClr val="tx1"/>
@@ -8217,7 +8349,7 @@
               <a:t>.md</a:t>
             </a:r>
             <a:r>
-              <a:rPr lang="en-US" sz="2400" dirty="0">
+              <a:rPr lang="en-US" sz="2400" b="1" dirty="0">
                 <a:ln>
                   <a:solidFill>
                     <a:schemeClr val="tx1"/>
@@ -8283,7 +8415,19 @@
                 <a:latin typeface="Helvetica Light" panose="020B0403020202020204" pitchFamily="34" charset="0"/>
                 <a:cs typeface="Calibri Light" panose="020F0302020204030204" pitchFamily="34" charset="0"/>
               </a:rPr>
-              <a:t> (bash script), unix_assignment_4.md </a:t>
+              <a:t> (bash script), </a:t>
+            </a:r>
+            <a:r>
+              <a:rPr lang="en-US" sz="2400" b="1" dirty="0">
+                <a:ln>
+                  <a:solidFill>
+                    <a:schemeClr val="tx1"/>
+                  </a:solidFill>
+                </a:ln>
+                <a:latin typeface="Helvetica Light" panose="020B0403020202020204" pitchFamily="34" charset="0"/>
+                <a:cs typeface="Calibri Light" panose="020F0302020204030204" pitchFamily="34" charset="0"/>
+              </a:rPr>
+              <a:t>linux_assignment_4.md </a:t>
             </a:r>
           </a:p>
           <a:p>
@@ -8316,7 +8460,31 @@
                 <a:latin typeface="Helvetica Light" panose="020B0403020202020204" pitchFamily="34" charset="0"/>
                 <a:cs typeface="Calibri Light" panose="020F0302020204030204" pitchFamily="34" charset="0"/>
               </a:rPr>
-              <a:t>Follow instructions for updating to python3 and installing anaconda navigator (in unix_assignment_4.md)</a:t>
+              <a:t>Follow instructions for updating to python3 and installing anaconda navigator (in </a:t>
+            </a:r>
+            <a:r>
+              <a:rPr lang="en-US" sz="2400" b="1" dirty="0">
+                <a:ln>
+                  <a:solidFill>
+                    <a:schemeClr val="tx1"/>
+                  </a:solidFill>
+                </a:ln>
+                <a:latin typeface="Helvetica Light" panose="020B0403020202020204" pitchFamily="34" charset="0"/>
+                <a:cs typeface="Calibri Light" panose="020F0302020204030204" pitchFamily="34" charset="0"/>
+              </a:rPr>
+              <a:t>linux_assignment_4.md</a:t>
+            </a:r>
+            <a:r>
+              <a:rPr lang="en-US" sz="2400" dirty="0">
+                <a:ln>
+                  <a:solidFill>
+                    <a:schemeClr val="tx1"/>
+                  </a:solidFill>
+                </a:ln>
+                <a:latin typeface="Helvetica Light" panose="020B0403020202020204" pitchFamily="34" charset="0"/>
+                <a:cs typeface="Calibri Light" panose="020F0302020204030204" pitchFamily="34" charset="0"/>
+              </a:rPr>
+              <a:t>)</a:t>
             </a:r>
           </a:p>
         </p:txBody>
@@ -9940,7 +10108,19 @@
               <a:rPr lang="en-US" sz="2600" dirty="0">
                 <a:latin typeface="Helvetica Light" panose="020B0403020202020204" pitchFamily="34" charset="0"/>
               </a:rPr>
-              <a:t>You can run a program from the directory you are working in, without changing to executable.</a:t>
+              <a:t>You can run a program from </a:t>
+            </a:r>
+            <a:r>
+              <a:rPr lang="en-US" sz="2600" b="1" dirty="0">
+                <a:latin typeface="Helvetica Light" panose="020B0403020202020204" pitchFamily="34" charset="0"/>
+              </a:rPr>
+              <a:t>the directory you are working in</a:t>
+            </a:r>
+            <a:r>
+              <a:rPr lang="en-US" sz="2600" dirty="0">
+                <a:latin typeface="Helvetica Light" panose="020B0403020202020204" pitchFamily="34" charset="0"/>
+              </a:rPr>
+              <a:t>, without changing to executable.</a:t>
             </a:r>
           </a:p>
           <a:p>
